--- a/ゲーム科3年/00_前期/オンラインゲームプログラミングⅠ/01_接続(クライアント).pptx
+++ b/ゲーム科3年/00_前期/オンラインゲームプログラミングⅠ/01_接続(クライアント).pptx
@@ -268,7 +268,7 @@
           <a:p>
             <a:fld id="{E9CC885B-4903-4D54-9A93-00025F12DED9}" type="datetimeFigureOut">
               <a:rPr kumimoji="1" lang="ja-JP" altLang="en-US" smtClean="0"/>
-              <a:t>2025/3/16</a:t>
+              <a:t>2025/8/18</a:t>
             </a:fld>
             <a:endParaRPr kumimoji="1" lang="ja-JP" altLang="en-US"/>
           </a:p>
@@ -498,7 +498,7 @@
           <a:p>
             <a:fld id="{E9CC885B-4903-4D54-9A93-00025F12DED9}" type="datetimeFigureOut">
               <a:rPr kumimoji="1" lang="ja-JP" altLang="en-US" smtClean="0"/>
-              <a:t>2025/3/16</a:t>
+              <a:t>2025/8/18</a:t>
             </a:fld>
             <a:endParaRPr kumimoji="1" lang="ja-JP" altLang="en-US"/>
           </a:p>
@@ -738,7 +738,7 @@
           <a:p>
             <a:fld id="{E9CC885B-4903-4D54-9A93-00025F12DED9}" type="datetimeFigureOut">
               <a:rPr kumimoji="1" lang="ja-JP" altLang="en-US" smtClean="0"/>
-              <a:t>2025/3/16</a:t>
+              <a:t>2025/8/18</a:t>
             </a:fld>
             <a:endParaRPr kumimoji="1" lang="ja-JP" altLang="en-US"/>
           </a:p>
@@ -968,7 +968,7 @@
           <a:p>
             <a:fld id="{E9CC885B-4903-4D54-9A93-00025F12DED9}" type="datetimeFigureOut">
               <a:rPr kumimoji="1" lang="ja-JP" altLang="en-US" smtClean="0"/>
-              <a:t>2025/3/16</a:t>
+              <a:t>2025/8/18</a:t>
             </a:fld>
             <a:endParaRPr kumimoji="1" lang="ja-JP" altLang="en-US"/>
           </a:p>
@@ -1243,7 +1243,7 @@
           <a:p>
             <a:fld id="{E9CC885B-4903-4D54-9A93-00025F12DED9}" type="datetimeFigureOut">
               <a:rPr kumimoji="1" lang="ja-JP" altLang="en-US" smtClean="0"/>
-              <a:t>2025/3/16</a:t>
+              <a:t>2025/8/18</a:t>
             </a:fld>
             <a:endParaRPr kumimoji="1" lang="ja-JP" altLang="en-US"/>
           </a:p>
@@ -1572,7 +1572,7 @@
           <a:p>
             <a:fld id="{E9CC885B-4903-4D54-9A93-00025F12DED9}" type="datetimeFigureOut">
               <a:rPr kumimoji="1" lang="ja-JP" altLang="en-US" smtClean="0"/>
-              <a:t>2025/3/16</a:t>
+              <a:t>2025/8/18</a:t>
             </a:fld>
             <a:endParaRPr kumimoji="1" lang="ja-JP" altLang="en-US"/>
           </a:p>
@@ -2048,7 +2048,7 @@
           <a:p>
             <a:fld id="{E9CC885B-4903-4D54-9A93-00025F12DED9}" type="datetimeFigureOut">
               <a:rPr kumimoji="1" lang="ja-JP" altLang="en-US" smtClean="0"/>
-              <a:t>2025/3/16</a:t>
+              <a:t>2025/8/18</a:t>
             </a:fld>
             <a:endParaRPr kumimoji="1" lang="ja-JP" altLang="en-US"/>
           </a:p>
@@ -2189,7 +2189,7 @@
           <a:p>
             <a:fld id="{E9CC885B-4903-4D54-9A93-00025F12DED9}" type="datetimeFigureOut">
               <a:rPr kumimoji="1" lang="ja-JP" altLang="en-US" smtClean="0"/>
-              <a:t>2025/3/16</a:t>
+              <a:t>2025/8/18</a:t>
             </a:fld>
             <a:endParaRPr kumimoji="1" lang="ja-JP" altLang="en-US"/>
           </a:p>
@@ -2302,7 +2302,7 @@
           <a:p>
             <a:fld id="{E9CC885B-4903-4D54-9A93-00025F12DED9}" type="datetimeFigureOut">
               <a:rPr kumimoji="1" lang="ja-JP" altLang="en-US" smtClean="0"/>
-              <a:t>2025/3/16</a:t>
+              <a:t>2025/8/18</a:t>
             </a:fld>
             <a:endParaRPr kumimoji="1" lang="ja-JP" altLang="en-US"/>
           </a:p>
@@ -2645,7 +2645,7 @@
           <a:p>
             <a:fld id="{E9CC885B-4903-4D54-9A93-00025F12DED9}" type="datetimeFigureOut">
               <a:rPr kumimoji="1" lang="ja-JP" altLang="en-US" smtClean="0"/>
-              <a:t>2025/3/16</a:t>
+              <a:t>2025/8/18</a:t>
             </a:fld>
             <a:endParaRPr kumimoji="1" lang="ja-JP" altLang="en-US"/>
           </a:p>
@@ -2933,7 +2933,7 @@
           <a:p>
             <a:fld id="{E9CC885B-4903-4D54-9A93-00025F12DED9}" type="datetimeFigureOut">
               <a:rPr kumimoji="1" lang="ja-JP" altLang="en-US" smtClean="0"/>
-              <a:t>2025/3/16</a:t>
+              <a:t>2025/8/18</a:t>
             </a:fld>
             <a:endParaRPr kumimoji="1" lang="ja-JP" altLang="en-US"/>
           </a:p>
@@ -3206,7 +3206,7 @@
           <a:p>
             <a:fld id="{E9CC885B-4903-4D54-9A93-00025F12DED9}" type="datetimeFigureOut">
               <a:rPr kumimoji="1" lang="ja-JP" altLang="en-US" smtClean="0"/>
-              <a:t>2025/3/16</a:t>
+              <a:t>2025/8/18</a:t>
             </a:fld>
             <a:endParaRPr kumimoji="1" lang="ja-JP" altLang="en-US"/>
           </a:p>
@@ -5318,54 +5318,6 @@
           </a:prstGeom>
         </p:spPr>
       </p:pic>
-      <p:sp>
-        <p:nvSpPr>
-          <p:cNvPr id="8" name="テキスト ボックス 7">
-            <a:extLst>
-              <a:ext uri="{FF2B5EF4-FFF2-40B4-BE49-F238E27FC236}">
-                <a16:creationId xmlns:a16="http://schemas.microsoft.com/office/drawing/2014/main" id="{83191439-038E-4E53-8968-6AA61576FF1A}"/>
-              </a:ext>
-            </a:extLst>
-          </p:cNvPr>
-          <p:cNvSpPr txBox="1"/>
-          <p:nvPr/>
-        </p:nvSpPr>
-        <p:spPr>
-          <a:xfrm>
-            <a:off x="567542" y="5357898"/>
-            <a:ext cx="8444941" cy="461665"/>
-          </a:xfrm>
-          <a:prstGeom prst="rect">
-            <a:avLst/>
-          </a:prstGeom>
-          <a:noFill/>
-        </p:spPr>
-        <p:txBody>
-          <a:bodyPr wrap="none" rtlCol="0">
-            <a:spAutoFit/>
-          </a:bodyPr>
-          <a:lstStyle/>
-          <a:p>
-            <a:r>
-              <a:rPr lang="en-US" altLang="ja-JP" sz="2400" dirty="0"/>
-              <a:t>※</a:t>
-            </a:r>
-            <a:r>
-              <a:rPr lang="ja-JP" altLang="en-US" sz="2400" dirty="0"/>
-              <a:t>実際にゲームに実装する際は〇〇</a:t>
-            </a:r>
-            <a:r>
-              <a:rPr lang="en-US" altLang="ja-JP" sz="2400" dirty="0"/>
-              <a:t>Scene</a:t>
-            </a:r>
-            <a:r>
-              <a:rPr lang="ja-JP" altLang="en-US" sz="2400" dirty="0"/>
-              <a:t>でこの処理をする</a:t>
-            </a:r>
-            <a:endParaRPr lang="en-US" altLang="ja-JP" sz="2400" dirty="0"/>
-          </a:p>
-        </p:txBody>
-      </p:sp>
     </p:spTree>
     <p:extLst>
       <p:ext uri="{BB962C8B-B14F-4D97-AF65-F5344CB8AC3E}">

--- a/ゲーム科3年/00_前期/オンラインゲームプログラミングⅠ/01_接続(クライアント).pptx
+++ b/ゲーム科3年/00_前期/オンラインゲームプログラミングⅠ/01_接続(クライアント).pptx
@@ -268,7 +268,7 @@
           <a:p>
             <a:fld id="{E9CC885B-4903-4D54-9A93-00025F12DED9}" type="datetimeFigureOut">
               <a:rPr kumimoji="1" lang="ja-JP" altLang="en-US" smtClean="0"/>
-              <a:t>2025/8/18</a:t>
+              <a:t>2025/8/22</a:t>
             </a:fld>
             <a:endParaRPr kumimoji="1" lang="ja-JP" altLang="en-US"/>
           </a:p>
@@ -498,7 +498,7 @@
           <a:p>
             <a:fld id="{E9CC885B-4903-4D54-9A93-00025F12DED9}" type="datetimeFigureOut">
               <a:rPr kumimoji="1" lang="ja-JP" altLang="en-US" smtClean="0"/>
-              <a:t>2025/8/18</a:t>
+              <a:t>2025/8/22</a:t>
             </a:fld>
             <a:endParaRPr kumimoji="1" lang="ja-JP" altLang="en-US"/>
           </a:p>
@@ -738,7 +738,7 @@
           <a:p>
             <a:fld id="{E9CC885B-4903-4D54-9A93-00025F12DED9}" type="datetimeFigureOut">
               <a:rPr kumimoji="1" lang="ja-JP" altLang="en-US" smtClean="0"/>
-              <a:t>2025/8/18</a:t>
+              <a:t>2025/8/22</a:t>
             </a:fld>
             <a:endParaRPr kumimoji="1" lang="ja-JP" altLang="en-US"/>
           </a:p>
@@ -968,7 +968,7 @@
           <a:p>
             <a:fld id="{E9CC885B-4903-4D54-9A93-00025F12DED9}" type="datetimeFigureOut">
               <a:rPr kumimoji="1" lang="ja-JP" altLang="en-US" smtClean="0"/>
-              <a:t>2025/8/18</a:t>
+              <a:t>2025/8/22</a:t>
             </a:fld>
             <a:endParaRPr kumimoji="1" lang="ja-JP" altLang="en-US"/>
           </a:p>
@@ -1243,7 +1243,7 @@
           <a:p>
             <a:fld id="{E9CC885B-4903-4D54-9A93-00025F12DED9}" type="datetimeFigureOut">
               <a:rPr kumimoji="1" lang="ja-JP" altLang="en-US" smtClean="0"/>
-              <a:t>2025/8/18</a:t>
+              <a:t>2025/8/22</a:t>
             </a:fld>
             <a:endParaRPr kumimoji="1" lang="ja-JP" altLang="en-US"/>
           </a:p>
@@ -1572,7 +1572,7 @@
           <a:p>
             <a:fld id="{E9CC885B-4903-4D54-9A93-00025F12DED9}" type="datetimeFigureOut">
               <a:rPr kumimoji="1" lang="ja-JP" altLang="en-US" smtClean="0"/>
-              <a:t>2025/8/18</a:t>
+              <a:t>2025/8/22</a:t>
             </a:fld>
             <a:endParaRPr kumimoji="1" lang="ja-JP" altLang="en-US"/>
           </a:p>
@@ -2048,7 +2048,7 @@
           <a:p>
             <a:fld id="{E9CC885B-4903-4D54-9A93-00025F12DED9}" type="datetimeFigureOut">
               <a:rPr kumimoji="1" lang="ja-JP" altLang="en-US" smtClean="0"/>
-              <a:t>2025/8/18</a:t>
+              <a:t>2025/8/22</a:t>
             </a:fld>
             <a:endParaRPr kumimoji="1" lang="ja-JP" altLang="en-US"/>
           </a:p>
@@ -2189,7 +2189,7 @@
           <a:p>
             <a:fld id="{E9CC885B-4903-4D54-9A93-00025F12DED9}" type="datetimeFigureOut">
               <a:rPr kumimoji="1" lang="ja-JP" altLang="en-US" smtClean="0"/>
-              <a:t>2025/8/18</a:t>
+              <a:t>2025/8/22</a:t>
             </a:fld>
             <a:endParaRPr kumimoji="1" lang="ja-JP" altLang="en-US"/>
           </a:p>
@@ -2302,7 +2302,7 @@
           <a:p>
             <a:fld id="{E9CC885B-4903-4D54-9A93-00025F12DED9}" type="datetimeFigureOut">
               <a:rPr kumimoji="1" lang="ja-JP" altLang="en-US" smtClean="0"/>
-              <a:t>2025/8/18</a:t>
+              <a:t>2025/8/22</a:t>
             </a:fld>
             <a:endParaRPr kumimoji="1" lang="ja-JP" altLang="en-US"/>
           </a:p>
@@ -2645,7 +2645,7 @@
           <a:p>
             <a:fld id="{E9CC885B-4903-4D54-9A93-00025F12DED9}" type="datetimeFigureOut">
               <a:rPr kumimoji="1" lang="ja-JP" altLang="en-US" smtClean="0"/>
-              <a:t>2025/8/18</a:t>
+              <a:t>2025/8/22</a:t>
             </a:fld>
             <a:endParaRPr kumimoji="1" lang="ja-JP" altLang="en-US"/>
           </a:p>
@@ -2933,7 +2933,7 @@
           <a:p>
             <a:fld id="{E9CC885B-4903-4D54-9A93-00025F12DED9}" type="datetimeFigureOut">
               <a:rPr kumimoji="1" lang="ja-JP" altLang="en-US" smtClean="0"/>
-              <a:t>2025/8/18</a:t>
+              <a:t>2025/8/22</a:t>
             </a:fld>
             <a:endParaRPr kumimoji="1" lang="ja-JP" altLang="en-US"/>
           </a:p>
@@ -3206,7 +3206,7 @@
           <a:p>
             <a:fld id="{E9CC885B-4903-4D54-9A93-00025F12DED9}" type="datetimeFigureOut">
               <a:rPr kumimoji="1" lang="ja-JP" altLang="en-US" smtClean="0"/>
-              <a:t>2025/8/18</a:t>
+              <a:t>2025/8/22</a:t>
             </a:fld>
             <a:endParaRPr kumimoji="1" lang="ja-JP" altLang="en-US"/>
           </a:p>
@@ -4995,7 +4995,7 @@
         <p:spPr>
           <a:xfrm>
             <a:off x="567542" y="4819967"/>
-            <a:ext cx="10956846" cy="461665"/>
+            <a:ext cx="10956846" cy="830997"/>
           </a:xfrm>
           <a:prstGeom prst="rect">
             <a:avLst/>
@@ -5007,6 +5007,25 @@
             <a:spAutoFit/>
           </a:bodyPr>
           <a:lstStyle/>
+          <a:p>
+            <a:r>
+              <a:rPr lang="en-US" altLang="ja-JP" sz="2400" dirty="0"/>
+              <a:t>※IP</a:t>
+            </a:r>
+            <a:r>
+              <a:rPr lang="ja-JP" altLang="en-US" sz="2400" dirty="0"/>
+              <a:t>アドレスはコマンドプロンプトで「</a:t>
+            </a:r>
+            <a:r>
+              <a:rPr lang="en-US" altLang="ja-JP" sz="2400" dirty="0"/>
+              <a:t>ipconfig</a:t>
+            </a:r>
+            <a:r>
+              <a:rPr lang="ja-JP" altLang="en-US" sz="2400"/>
+              <a:t>」と打つと表示されます</a:t>
+            </a:r>
+            <a:endParaRPr lang="en-US" altLang="ja-JP" sz="2400" dirty="0"/>
+          </a:p>
           <a:p>
             <a:r>
               <a:rPr lang="en-US" altLang="ja-JP" sz="2400" dirty="0"/>
